--- a/data/sites/manufacturing/Quality Assurance/plant-quality-management-system-executive-deck.pptx
+++ b/data/sites/manufacturing/Quality Assurance/plant-quality-management-system-executive-deck.pptx
@@ -15,8 +15,6 @@
     <p:sldId id="263" r:id="rId14"/>
     <p:sldId id="264" r:id="rId15"/>
     <p:sldId id="265" r:id="rId16"/>
-    <p:sldId id="266" r:id="rId17"/>
-    <p:sldId id="267" r:id="rId18"/>
   </p:sldIdLst>
   <p:sldSz cx="12191695" cy="6858000" type="screen4x3"/>
   <p:notesSz cx="6858000" cy="9144000"/>
@@ -3493,7 +3491,7 @@
           <a:lstStyle/>
           <a:p>
             <a:r>
-              <a:t>10. Cross-Functional Dependencies - Plant Quality Management System Exec</a:t>
+              <a:t>10. Appendix, Lineage &amp; Sign-off - Plant Quality Management System Exec</a:t>
             </a:r>
           </a:p>
         </p:txBody>
@@ -3514,7 +3512,7 @@
           <a:lstStyle/>
           <a:p>
             <a:r>
-              <a:t>Multi-slide quality review deck covering Statistical Process Control, CAPA closure velocity, ISO 9001 audit readiness, and supplier lot acceptance. Section 10 (Cross-Functional Dependencies) applies to Quality Assurance within Manufacturing Knowledge Hub and is maintained by Linda Park. Documents upstream and downstream team dependencies and service-level commitments.</a:t>
+              <a:t>Multi-slide quality review deck covering Statistical Process Control, CAPA closure velocity, ISO 9001 audit readiness, and supplier lot acceptance. Section 10 (Appendix, Lineage &amp; Sign-off) applies to Quality Assurance within Manufacturing Knowledge Hub and is maintained by Linda Park. Records document lineage, governance metadata, version history, and owner sign-off.</a:t>
             </a:r>
           </a:p>
           <a:p>
@@ -3865,886 +3863,6 @@
                       </a:pPr>
                       <a:r>
                         <a:t>Stage 10 Verified</a:t>
-                      </a:r>
-                    </a:p>
-                  </a:txBody>
-                  <a:tcPr/>
-                </a:tc>
-              </a:tr>
-            </a:tbl>
-          </a:graphicData>
-        </a:graphic>
-      </p:graphicFrame>
-      <p:pic>
-        <p:nvPicPr>
-          <p:cNvPr id="5" name="Picture 4" descr="image.png"/>
-          <p:cNvPicPr>
-            <a:picLocks noChangeAspect="1"/>
-          </p:cNvPicPr>
-          <p:nvPr/>
-        </p:nvPicPr>
-        <p:blipFill>
-          <a:blip r:embed="rId2"/>
-          <a:stretch>
-            <a:fillRect/>
-          </a:stretch>
-        </p:blipFill>
-        <p:spPr>
-          <a:xfrm>
-            <a:off x="6492240" y="3703320"/>
-            <a:ext cx="5120640" cy="1828800"/>
-          </a:xfrm>
-          <a:prstGeom prst="rect">
-            <a:avLst/>
-          </a:prstGeom>
-        </p:spPr>
-      </p:pic>
-    </p:spTree>
-  </p:cSld>
-  <p:clrMapOvr>
-    <a:masterClrMapping/>
-  </p:clrMapOvr>
-</p:sld>
-</file>
-
-<file path=ppt/slides/slide11.xml><?xml version="1.0" encoding="utf-8"?>
-<p:sld xmlns:a="http://schemas.openxmlformats.org/drawingml/2006/main" xmlns:p="http://schemas.openxmlformats.org/presentationml/2006/main" xmlns:r="http://schemas.openxmlformats.org/officeDocument/2006/relationships">
-  <p:cSld>
-    <p:spTree>
-      <p:nvGrpSpPr>
-        <p:cNvPr id="1" name=""/>
-        <p:cNvGrpSpPr/>
-        <p:nvPr/>
-      </p:nvGrpSpPr>
-      <p:grpSpPr/>
-      <p:sp>
-        <p:nvSpPr>
-          <p:cNvPr id="2" name="Title 1"/>
-          <p:cNvSpPr>
-            <a:spLocks noGrp="1"/>
-          </p:cNvSpPr>
-          <p:nvPr>
-            <p:ph type="title"/>
-          </p:nvPr>
-        </p:nvSpPr>
-        <p:spPr/>
-        <p:txBody>
-          <a:bodyPr/>
-          <a:lstStyle/>
-          <a:p>
-            <a:r>
-              <a:t>11. Continuous Improvement Roadmap - Plant Quality Management System Exec</a:t>
-            </a:r>
-          </a:p>
-        </p:txBody>
-      </p:sp>
-      <p:sp>
-        <p:nvSpPr>
-          <p:cNvPr id="3" name="Content Placeholder 2"/>
-          <p:cNvSpPr>
-            <a:spLocks noGrp="1"/>
-          </p:cNvSpPr>
-          <p:nvPr>
-            <p:ph idx="1"/>
-          </p:nvPr>
-        </p:nvSpPr>
-        <p:spPr/>
-        <p:txBody>
-          <a:bodyPr/>
-          <a:lstStyle/>
-          <a:p>
-            <a:r>
-              <a:t>Multi-slide quality review deck covering Statistical Process Control, CAPA closure velocity, ISO 9001 audit readiness, and supplier lot acceptance. Section 11 (Continuous Improvement Roadmap) applies to Quality Assurance within Manufacturing Knowledge Hub and is maintained by Linda Park. Schedules quarterly optimization milestones, automation targets, and capability reviews.</a:t>
-            </a:r>
-          </a:p>
-          <a:p>
-            <a:pPr lvl="1"/>
-            <a:r>
-              <a:t>Tracks gauge R&amp;R and calibration compliance across 140 floor measurement instruments.</a:t>
-            </a:r>
-          </a:p>
-          <a:p>
-            <a:pPr lvl="1"/>
-            <a:r>
-              <a:t>Outlines zero-defect containment gates for incoming fastener and bracket lots.</a:t>
-            </a:r>
-          </a:p>
-          <a:p>
-            <a:pPr lvl="1"/>
-            <a:r>
-              <a:t>Section 11 review cadence is tracked by Linda Park under Quality Assurance governance.</a:t>
-            </a:r>
-          </a:p>
-        </p:txBody>
-      </p:sp>
-      <p:graphicFrame>
-        <p:nvGraphicFramePr>
-          <p:cNvPr id="4" name="Table 3"/>
-          <p:cNvGraphicFramePr>
-            <a:graphicFrameLocks noGrp="1"/>
-          </p:cNvGraphicFramePr>
-          <p:nvPr/>
-        </p:nvGraphicFramePr>
-        <p:xfrm>
-          <a:off x="548640" y="3749039"/>
-          <a:ext cx="5669280" cy="1737360"/>
-        </p:xfrm>
-        <a:graphic>
-          <a:graphicData uri="http://schemas.openxmlformats.org/drawingml/2006/table">
-            <a:tbl>
-              <a:tblPr firstRow="1" bandRow="1">
-                <a:tableStyleId>{5C22544A-7EE6-4342-B048-85BDC9FD1C3A}</a:tableStyleId>
-              </a:tblPr>
-              <a:tblGrid>
-                <a:gridCol w="1417320"/>
-                <a:gridCol w="1417320"/>
-                <a:gridCol w="1417320"/>
-                <a:gridCol w="1417320"/>
-              </a:tblGrid>
-              <a:tr h="347472">
-                <a:tc>
-                  <a:txBody>
-                    <a:bodyPr/>
-                    <a:lstStyle/>
-                    <a:p>
-                      <a:pPr>
-                        <a:defRPr b="1" sz="1100"/>
-                      </a:pPr>
-                      <a:r>
-                        <a:t>Production Line</a:t>
-                      </a:r>
-                    </a:p>
-                  </a:txBody>
-                  <a:tcPr/>
-                </a:tc>
-                <a:tc>
-                  <a:txBody>
-                    <a:bodyPr/>
-                    <a:lstStyle/>
-                    <a:p>
-                      <a:pPr>
-                        <a:defRPr b="1" sz="1100"/>
-                      </a:pPr>
-                      <a:r>
-                        <a:t>First-Pass Yield</a:t>
-                      </a:r>
-                    </a:p>
-                  </a:txBody>
-                  <a:tcPr/>
-                </a:tc>
-                <a:tc>
-                  <a:txBody>
-                    <a:bodyPr/>
-                    <a:lstStyle/>
-                    <a:p>
-                      <a:pPr>
-                        <a:defRPr b="1" sz="1100"/>
-                      </a:pPr>
-                      <a:r>
-                        <a:t>Cpk Index</a:t>
-                      </a:r>
-                    </a:p>
-                  </a:txBody>
-                  <a:tcPr/>
-                </a:tc>
-                <a:tc>
-                  <a:txBody>
-                    <a:bodyPr/>
-                    <a:lstStyle/>
-                    <a:p>
-                      <a:pPr>
-                        <a:defRPr b="1" sz="1100"/>
-                      </a:pPr>
-                      <a:r>
-                        <a:t>Open CAPAs</a:t>
-                      </a:r>
-                    </a:p>
-                  </a:txBody>
-                  <a:tcPr/>
-                </a:tc>
-              </a:tr>
-              <a:tr h="347472">
-                <a:tc>
-                  <a:txBody>
-                    <a:bodyPr/>
-                    <a:lstStyle/>
-                    <a:p>
-                      <a:pPr>
-                        <a:defRPr sz="1000"/>
-                      </a:pPr>
-                      <a:r>
-                        <a:t>Line 1</a:t>
-                      </a:r>
-                    </a:p>
-                  </a:txBody>
-                  <a:tcPr/>
-                </a:tc>
-                <a:tc>
-                  <a:txBody>
-                    <a:bodyPr/>
-                    <a:lstStyle/>
-                    <a:p>
-                      <a:pPr>
-                        <a:defRPr sz="1000"/>
-                      </a:pPr>
-                      <a:r>
-                        <a:t>96.4%</a:t>
-                      </a:r>
-                    </a:p>
-                  </a:txBody>
-                  <a:tcPr/>
-                </a:tc>
-                <a:tc>
-                  <a:txBody>
-                    <a:bodyPr/>
-                    <a:lstStyle/>
-                    <a:p>
-                      <a:pPr>
-                        <a:defRPr sz="1000"/>
-                      </a:pPr>
-                      <a:r>
-                        <a:t>1.52</a:t>
-                      </a:r>
-                    </a:p>
-                  </a:txBody>
-                  <a:tcPr/>
-                </a:tc>
-                <a:tc>
-                  <a:txBody>
-                    <a:bodyPr/>
-                    <a:lstStyle/>
-                    <a:p>
-                      <a:pPr>
-                        <a:defRPr sz="1000"/>
-                      </a:pPr>
-                      <a:r>
-                        <a:t>1</a:t>
-                      </a:r>
-                    </a:p>
-                  </a:txBody>
-                  <a:tcPr/>
-                </a:tc>
-              </a:tr>
-              <a:tr h="347472">
-                <a:tc>
-                  <a:txBody>
-                    <a:bodyPr/>
-                    <a:lstStyle/>
-                    <a:p>
-                      <a:pPr>
-                        <a:defRPr sz="1000"/>
-                      </a:pPr>
-                      <a:r>
-                        <a:t>Line 2</a:t>
-                      </a:r>
-                    </a:p>
-                  </a:txBody>
-                  <a:tcPr/>
-                </a:tc>
-                <a:tc>
-                  <a:txBody>
-                    <a:bodyPr/>
-                    <a:lstStyle/>
-                    <a:p>
-                      <a:pPr>
-                        <a:defRPr sz="1000"/>
-                      </a:pPr>
-                      <a:r>
-                        <a:t>94.1%</a:t>
-                      </a:r>
-                    </a:p>
-                  </a:txBody>
-                  <a:tcPr/>
-                </a:tc>
-                <a:tc>
-                  <a:txBody>
-                    <a:bodyPr/>
-                    <a:lstStyle/>
-                    <a:p>
-                      <a:pPr>
-                        <a:defRPr sz="1000"/>
-                      </a:pPr>
-                      <a:r>
-                        <a:t>1.39</a:t>
-                      </a:r>
-                    </a:p>
-                  </a:txBody>
-                  <a:tcPr/>
-                </a:tc>
-                <a:tc>
-                  <a:txBody>
-                    <a:bodyPr/>
-                    <a:lstStyle/>
-                    <a:p>
-                      <a:pPr>
-                        <a:defRPr sz="1000"/>
-                      </a:pPr>
-                      <a:r>
-                        <a:t>2</a:t>
-                      </a:r>
-                    </a:p>
-                  </a:txBody>
-                  <a:tcPr/>
-                </a:tc>
-              </a:tr>
-              <a:tr h="347472">
-                <a:tc>
-                  <a:txBody>
-                    <a:bodyPr/>
-                    <a:lstStyle/>
-                    <a:p>
-                      <a:pPr>
-                        <a:defRPr sz="1000"/>
-                      </a:pPr>
-                      <a:r>
-                        <a:t>Line 3</a:t>
-                      </a:r>
-                    </a:p>
-                  </a:txBody>
-                  <a:tcPr/>
-                </a:tc>
-                <a:tc>
-                  <a:txBody>
-                    <a:bodyPr/>
-                    <a:lstStyle/>
-                    <a:p>
-                      <a:pPr>
-                        <a:defRPr sz="1000"/>
-                      </a:pPr>
-                      <a:r>
-                        <a:t>95.2%</a:t>
-                      </a:r>
-                    </a:p>
-                  </a:txBody>
-                  <a:tcPr/>
-                </a:tc>
-                <a:tc>
-                  <a:txBody>
-                    <a:bodyPr/>
-                    <a:lstStyle/>
-                    <a:p>
-                      <a:pPr>
-                        <a:defRPr sz="1000"/>
-                      </a:pPr>
-                      <a:r>
-                        <a:t>1.48</a:t>
-                      </a:r>
-                    </a:p>
-                  </a:txBody>
-                  <a:tcPr/>
-                </a:tc>
-                <a:tc>
-                  <a:txBody>
-                    <a:bodyPr/>
-                    <a:lstStyle/>
-                    <a:p>
-                      <a:pPr>
-                        <a:defRPr sz="1000"/>
-                      </a:pPr>
-                      <a:r>
-                        <a:t>1</a:t>
-                      </a:r>
-                    </a:p>
-                  </a:txBody>
-                  <a:tcPr/>
-                </a:tc>
-              </a:tr>
-              <a:tr h="347472">
-                <a:tc>
-                  <a:txBody>
-                    <a:bodyPr/>
-                    <a:lstStyle/>
-                    <a:p>
-                      <a:pPr>
-                        <a:defRPr sz="1000"/>
-                      </a:pPr>
-                      <a:r>
-                        <a:t>Sec-11</a:t>
-                      </a:r>
-                    </a:p>
-                  </a:txBody>
-                  <a:tcPr/>
-                </a:tc>
-                <a:tc>
-                  <a:txBody>
-                    <a:bodyPr/>
-                    <a:lstStyle/>
-                    <a:p>
-                      <a:pPr>
-                        <a:defRPr sz="1000"/>
-                      </a:pPr>
-                      <a:r>
-                        <a:t>94.1%</a:t>
-                      </a:r>
-                    </a:p>
-                  </a:txBody>
-                  <a:tcPr/>
-                </a:tc>
-                <a:tc>
-                  <a:txBody>
-                    <a:bodyPr/>
-                    <a:lstStyle/>
-                    <a:p>
-                      <a:pPr>
-                        <a:defRPr sz="1000"/>
-                      </a:pPr>
-                      <a:r>
-                        <a:t>1.39</a:t>
-                      </a:r>
-                    </a:p>
-                  </a:txBody>
-                  <a:tcPr/>
-                </a:tc>
-                <a:tc>
-                  <a:txBody>
-                    <a:bodyPr/>
-                    <a:lstStyle/>
-                    <a:p>
-                      <a:pPr>
-                        <a:defRPr sz="1000"/>
-                      </a:pPr>
-                      <a:r>
-                        <a:t>Stage 11 Verified</a:t>
-                      </a:r>
-                    </a:p>
-                  </a:txBody>
-                  <a:tcPr/>
-                </a:tc>
-              </a:tr>
-            </a:tbl>
-          </a:graphicData>
-        </a:graphic>
-      </p:graphicFrame>
-      <p:pic>
-        <p:nvPicPr>
-          <p:cNvPr id="5" name="Picture 4" descr="image.png"/>
-          <p:cNvPicPr>
-            <a:picLocks noChangeAspect="1"/>
-          </p:cNvPicPr>
-          <p:nvPr/>
-        </p:nvPicPr>
-        <p:blipFill>
-          <a:blip r:embed="rId2"/>
-          <a:stretch>
-            <a:fillRect/>
-          </a:stretch>
-        </p:blipFill>
-        <p:spPr>
-          <a:xfrm>
-            <a:off x="6492240" y="3703320"/>
-            <a:ext cx="5120640" cy="1828800"/>
-          </a:xfrm>
-          <a:prstGeom prst="rect">
-            <a:avLst/>
-          </a:prstGeom>
-        </p:spPr>
-      </p:pic>
-    </p:spTree>
-  </p:cSld>
-  <p:clrMapOvr>
-    <a:masterClrMapping/>
-  </p:clrMapOvr>
-</p:sld>
-</file>
-
-<file path=ppt/slides/slide12.xml><?xml version="1.0" encoding="utf-8"?>
-<p:sld xmlns:a="http://schemas.openxmlformats.org/drawingml/2006/main" xmlns:p="http://schemas.openxmlformats.org/presentationml/2006/main" xmlns:r="http://schemas.openxmlformats.org/officeDocument/2006/relationships">
-  <p:cSld>
-    <p:spTree>
-      <p:nvGrpSpPr>
-        <p:cNvPr id="1" name=""/>
-        <p:cNvGrpSpPr/>
-        <p:nvPr/>
-      </p:nvGrpSpPr>
-      <p:grpSpPr/>
-      <p:sp>
-        <p:nvSpPr>
-          <p:cNvPr id="2" name="Title 1"/>
-          <p:cNvSpPr>
-            <a:spLocks noGrp="1"/>
-          </p:cNvSpPr>
-          <p:nvPr>
-            <p:ph type="title"/>
-          </p:nvPr>
-        </p:nvSpPr>
-        <p:spPr/>
-        <p:txBody>
-          <a:bodyPr/>
-          <a:lstStyle/>
-          <a:p>
-            <a:r>
-              <a:t>12. Appendix, Lineage &amp; Sign-off - Plant Quality Management System Exec</a:t>
-            </a:r>
-          </a:p>
-        </p:txBody>
-      </p:sp>
-      <p:sp>
-        <p:nvSpPr>
-          <p:cNvPr id="3" name="Content Placeholder 2"/>
-          <p:cNvSpPr>
-            <a:spLocks noGrp="1"/>
-          </p:cNvSpPr>
-          <p:nvPr>
-            <p:ph idx="1"/>
-          </p:nvPr>
-        </p:nvSpPr>
-        <p:spPr/>
-        <p:txBody>
-          <a:bodyPr/>
-          <a:lstStyle/>
-          <a:p>
-            <a:r>
-              <a:t>Multi-slide quality review deck covering Statistical Process Control, CAPA closure velocity, ISO 9001 audit readiness, and supplier lot acceptance. Section 12 (Appendix, Lineage &amp; Sign-off) applies to Quality Assurance within Manufacturing Knowledge Hub and is maintained by Linda Park. Records document lineage, governance metadata, version history, and owner sign-off.</a:t>
-            </a:r>
-          </a:p>
-          <a:p>
-            <a:pPr lvl="1"/>
-            <a:r>
-              <a:t>Outlines zero-defect containment gates for incoming fastener and bracket lots.</a:t>
-            </a:r>
-          </a:p>
-          <a:p>
-            <a:pPr lvl="1"/>
-            <a:r>
-              <a:t>Presents X-bar/R control chart stability and Cpk capability across Lines 1, 2, and 3.</a:t>
-            </a:r>
-          </a:p>
-          <a:p>
-            <a:pPr lvl="1"/>
-            <a:r>
-              <a:t>Section 12 review cadence is tracked by Linda Park under Quality Assurance governance.</a:t>
-            </a:r>
-          </a:p>
-        </p:txBody>
-      </p:sp>
-      <p:graphicFrame>
-        <p:nvGraphicFramePr>
-          <p:cNvPr id="4" name="Table 3"/>
-          <p:cNvGraphicFramePr>
-            <a:graphicFrameLocks noGrp="1"/>
-          </p:cNvGraphicFramePr>
-          <p:nvPr/>
-        </p:nvGraphicFramePr>
-        <p:xfrm>
-          <a:off x="548640" y="3749039"/>
-          <a:ext cx="5669280" cy="1737360"/>
-        </p:xfrm>
-        <a:graphic>
-          <a:graphicData uri="http://schemas.openxmlformats.org/drawingml/2006/table">
-            <a:tbl>
-              <a:tblPr firstRow="1" bandRow="1">
-                <a:tableStyleId>{5C22544A-7EE6-4342-B048-85BDC9FD1C3A}</a:tableStyleId>
-              </a:tblPr>
-              <a:tblGrid>
-                <a:gridCol w="1417320"/>
-                <a:gridCol w="1417320"/>
-                <a:gridCol w="1417320"/>
-                <a:gridCol w="1417320"/>
-              </a:tblGrid>
-              <a:tr h="347472">
-                <a:tc>
-                  <a:txBody>
-                    <a:bodyPr/>
-                    <a:lstStyle/>
-                    <a:p>
-                      <a:pPr>
-                        <a:defRPr b="1" sz="1100"/>
-                      </a:pPr>
-                      <a:r>
-                        <a:t>Production Line</a:t>
-                      </a:r>
-                    </a:p>
-                  </a:txBody>
-                  <a:tcPr/>
-                </a:tc>
-                <a:tc>
-                  <a:txBody>
-                    <a:bodyPr/>
-                    <a:lstStyle/>
-                    <a:p>
-                      <a:pPr>
-                        <a:defRPr b="1" sz="1100"/>
-                      </a:pPr>
-                      <a:r>
-                        <a:t>First-Pass Yield</a:t>
-                      </a:r>
-                    </a:p>
-                  </a:txBody>
-                  <a:tcPr/>
-                </a:tc>
-                <a:tc>
-                  <a:txBody>
-                    <a:bodyPr/>
-                    <a:lstStyle/>
-                    <a:p>
-                      <a:pPr>
-                        <a:defRPr b="1" sz="1100"/>
-                      </a:pPr>
-                      <a:r>
-                        <a:t>Cpk Index</a:t>
-                      </a:r>
-                    </a:p>
-                  </a:txBody>
-                  <a:tcPr/>
-                </a:tc>
-                <a:tc>
-                  <a:txBody>
-                    <a:bodyPr/>
-                    <a:lstStyle/>
-                    <a:p>
-                      <a:pPr>
-                        <a:defRPr b="1" sz="1100"/>
-                      </a:pPr>
-                      <a:r>
-                        <a:t>Open CAPAs</a:t>
-                      </a:r>
-                    </a:p>
-                  </a:txBody>
-                  <a:tcPr/>
-                </a:tc>
-              </a:tr>
-              <a:tr h="347472">
-                <a:tc>
-                  <a:txBody>
-                    <a:bodyPr/>
-                    <a:lstStyle/>
-                    <a:p>
-                      <a:pPr>
-                        <a:defRPr sz="1000"/>
-                      </a:pPr>
-                      <a:r>
-                        <a:t>Line 1</a:t>
-                      </a:r>
-                    </a:p>
-                  </a:txBody>
-                  <a:tcPr/>
-                </a:tc>
-                <a:tc>
-                  <a:txBody>
-                    <a:bodyPr/>
-                    <a:lstStyle/>
-                    <a:p>
-                      <a:pPr>
-                        <a:defRPr sz="1000"/>
-                      </a:pPr>
-                      <a:r>
-                        <a:t>96.4%</a:t>
-                      </a:r>
-                    </a:p>
-                  </a:txBody>
-                  <a:tcPr/>
-                </a:tc>
-                <a:tc>
-                  <a:txBody>
-                    <a:bodyPr/>
-                    <a:lstStyle/>
-                    <a:p>
-                      <a:pPr>
-                        <a:defRPr sz="1000"/>
-                      </a:pPr>
-                      <a:r>
-                        <a:t>1.52</a:t>
-                      </a:r>
-                    </a:p>
-                  </a:txBody>
-                  <a:tcPr/>
-                </a:tc>
-                <a:tc>
-                  <a:txBody>
-                    <a:bodyPr/>
-                    <a:lstStyle/>
-                    <a:p>
-                      <a:pPr>
-                        <a:defRPr sz="1000"/>
-                      </a:pPr>
-                      <a:r>
-                        <a:t>1</a:t>
-                      </a:r>
-                    </a:p>
-                  </a:txBody>
-                  <a:tcPr/>
-                </a:tc>
-              </a:tr>
-              <a:tr h="347472">
-                <a:tc>
-                  <a:txBody>
-                    <a:bodyPr/>
-                    <a:lstStyle/>
-                    <a:p>
-                      <a:pPr>
-                        <a:defRPr sz="1000"/>
-                      </a:pPr>
-                      <a:r>
-                        <a:t>Line 2</a:t>
-                      </a:r>
-                    </a:p>
-                  </a:txBody>
-                  <a:tcPr/>
-                </a:tc>
-                <a:tc>
-                  <a:txBody>
-                    <a:bodyPr/>
-                    <a:lstStyle/>
-                    <a:p>
-                      <a:pPr>
-                        <a:defRPr sz="1000"/>
-                      </a:pPr>
-                      <a:r>
-                        <a:t>94.1%</a:t>
-                      </a:r>
-                    </a:p>
-                  </a:txBody>
-                  <a:tcPr/>
-                </a:tc>
-                <a:tc>
-                  <a:txBody>
-                    <a:bodyPr/>
-                    <a:lstStyle/>
-                    <a:p>
-                      <a:pPr>
-                        <a:defRPr sz="1000"/>
-                      </a:pPr>
-                      <a:r>
-                        <a:t>1.39</a:t>
-                      </a:r>
-                    </a:p>
-                  </a:txBody>
-                  <a:tcPr/>
-                </a:tc>
-                <a:tc>
-                  <a:txBody>
-                    <a:bodyPr/>
-                    <a:lstStyle/>
-                    <a:p>
-                      <a:pPr>
-                        <a:defRPr sz="1000"/>
-                      </a:pPr>
-                      <a:r>
-                        <a:t>2</a:t>
-                      </a:r>
-                    </a:p>
-                  </a:txBody>
-                  <a:tcPr/>
-                </a:tc>
-              </a:tr>
-              <a:tr h="347472">
-                <a:tc>
-                  <a:txBody>
-                    <a:bodyPr/>
-                    <a:lstStyle/>
-                    <a:p>
-                      <a:pPr>
-                        <a:defRPr sz="1000"/>
-                      </a:pPr>
-                      <a:r>
-                        <a:t>Line 3</a:t>
-                      </a:r>
-                    </a:p>
-                  </a:txBody>
-                  <a:tcPr/>
-                </a:tc>
-                <a:tc>
-                  <a:txBody>
-                    <a:bodyPr/>
-                    <a:lstStyle/>
-                    <a:p>
-                      <a:pPr>
-                        <a:defRPr sz="1000"/>
-                      </a:pPr>
-                      <a:r>
-                        <a:t>95.2%</a:t>
-                      </a:r>
-                    </a:p>
-                  </a:txBody>
-                  <a:tcPr/>
-                </a:tc>
-                <a:tc>
-                  <a:txBody>
-                    <a:bodyPr/>
-                    <a:lstStyle/>
-                    <a:p>
-                      <a:pPr>
-                        <a:defRPr sz="1000"/>
-                      </a:pPr>
-                      <a:r>
-                        <a:t>1.48</a:t>
-                      </a:r>
-                    </a:p>
-                  </a:txBody>
-                  <a:tcPr/>
-                </a:tc>
-                <a:tc>
-                  <a:txBody>
-                    <a:bodyPr/>
-                    <a:lstStyle/>
-                    <a:p>
-                      <a:pPr>
-                        <a:defRPr sz="1000"/>
-                      </a:pPr>
-                      <a:r>
-                        <a:t>1</a:t>
-                      </a:r>
-                    </a:p>
-                  </a:txBody>
-                  <a:tcPr/>
-                </a:tc>
-              </a:tr>
-              <a:tr h="347472">
-                <a:tc>
-                  <a:txBody>
-                    <a:bodyPr/>
-                    <a:lstStyle/>
-                    <a:p>
-                      <a:pPr>
-                        <a:defRPr sz="1000"/>
-                      </a:pPr>
-                      <a:r>
-                        <a:t>Sec-12</a:t>
-                      </a:r>
-                    </a:p>
-                  </a:txBody>
-                  <a:tcPr/>
-                </a:tc>
-                <a:tc>
-                  <a:txBody>
-                    <a:bodyPr/>
-                    <a:lstStyle/>
-                    <a:p>
-                      <a:pPr>
-                        <a:defRPr sz="1000"/>
-                      </a:pPr>
-                      <a:r>
-                        <a:t>95.2%</a:t>
-                      </a:r>
-                    </a:p>
-                  </a:txBody>
-                  <a:tcPr/>
-                </a:tc>
-                <a:tc>
-                  <a:txBody>
-                    <a:bodyPr/>
-                    <a:lstStyle/>
-                    <a:p>
-                      <a:pPr>
-                        <a:defRPr sz="1000"/>
-                      </a:pPr>
-                      <a:r>
-                        <a:t>1.48</a:t>
-                      </a:r>
-                    </a:p>
-                  </a:txBody>
-                  <a:tcPr/>
-                </a:tc>
-                <a:tc>
-                  <a:txBody>
-                    <a:bodyPr/>
-                    <a:lstStyle/>
-                    <a:p>
-                      <a:pPr>
-                        <a:defRPr sz="1000"/>
-                      </a:pPr>
-                      <a:r>
-                        <a:t>Stage 12 Verified</a:t>
                       </a:r>
                     </a:p>
                   </a:txBody>
